--- a/level3/slides/Level3_Lesson9_Slides.pptx
+++ b/level3/slides/Level3_Lesson9_Slides.pptx
@@ -536,7 +536,7 @@
           </a:p>
           <a:p>
             <a:r>
-              <a:t>Audio: the listening audio for this lesson (about 1:15) is coming soon. It will use computer-generated voices (Chatterbox TTS cloned from synthetic Kokoro-82M reference clips); no recordings of real people. Until it is ready, read the listening script (in the notes of the Before You Listen slide) with a volunteer. The names and the story are invented.</a:t>
+              <a:t>Audio: synthetic voices, computer-generated (Chatterbox TTS cloned from Kokoro-82M reference clips). No recordings of real people. The names and the story are invented.</a:t>
             </a:r>
           </a:p>
           <a:p>
@@ -1496,7 +1496,7 @@
           </a:p>
           <a:p>
             <a:r>
-              <a:t>The audio (about 1:15) is coming soon. When it is ready, it plays the conversation once; press play again for play 2. Until then, read the listening script (at the end of these notes) with a volunteer.</a:t>
+              <a:t>The audio (L3_L9_listening.mp3, about 1:20) plays the conversation once. Press play again for play 2. A third play is fine if the class needs it.</a:t>
             </a:r>
           </a:p>
           <a:p>
@@ -1506,7 +1506,7 @@
           </a:p>
           <a:p>
             <a:r>
-              <a:t>Audio: the listening audio for this lesson (about 1:15) is coming soon. It will use computer-generated voices (Chatterbox TTS cloned from synthetic Kokoro-82M reference clips); no recordings of real people. Until it is ready, read the listening script (in the notes of the Before You Listen slide) with a volunteer. The names and the story are invented.</a:t>
+              <a:t>Audio: synthetic voices, computer-generated (Chatterbox TTS cloned from Kokoro-82M reference clips). No recordings of real people. The names and the story are invented.</a:t>
             </a:r>
           </a:p>
           <a:p>
@@ -1517,91 +1517,6 @@
           <a:p>
             <a:r>
               <a:t>Picture: Twemoji graphics by Twitter, Inc. and other contributors (https://github.com/jdecked/twemoji), CC BY 4.0 (https://creativecommons.org/licenses/by/4.0/); resized and combined, with speech bubbles, signs, and labels (images/CREDITS.md).</a:t>
-            </a:r>
-          </a:p>
-          <a:p>
-            <a:r>
-              <a:t>Listening script (the audio is coming soon; until then, read it aloud with a volunteer at a normal, friendly speed):</a:t>
-            </a:r>
-          </a:p>
-          <a:p>
-            <a:r>
-              <a:t>Narrator: Lesson nine. Listening. Lucia has a job interview at a hotel. Mr. Hall is the manager. Listen.</a:t>
-            </a:r>
-          </a:p>
-          <a:p>
-            <a:r>
-              <a:t>Mr. Hall: Hi, Lucia. Thank you for coming in. Please sit down. So, tell me about yourself.</a:t>
-            </a:r>
-          </a:p>
-          <a:p>
-            <a:r>
-              <a:t>Lucia: Well, I have three years of experience in maintenance. I worked at a big apartment building.</a:t>
-            </a:r>
-          </a:p>
-          <a:p>
-            <a:r>
-              <a:t>Mr. Hall: That's great. What are you good at?</a:t>
-            </a:r>
-          </a:p>
-          <a:p>
-            <a:r>
-              <a:t>Lucia: I'm good at fixing things, and I'm good at solving problems.</a:t>
-            </a:r>
-          </a:p>
-          <a:p>
-            <a:r>
-              <a:t>Mr. Hall: Are you reliable?</a:t>
-            </a:r>
-          </a:p>
-          <a:p>
-            <a:r>
-              <a:t>Lucia: Yes. I was never late at my last job, and I always finish my work.</a:t>
-            </a:r>
-          </a:p>
-          <a:p>
-            <a:r>
-              <a:t>Mr. Hall: Good. Do you enjoy working on a team?</a:t>
-            </a:r>
-          </a:p>
-          <a:p>
-            <a:r>
-              <a:t>Lucia: Yes, I enjoy helping people. I like teamwork.</a:t>
-            </a:r>
-          </a:p>
-          <a:p>
-            <a:r>
-              <a:t>Mr. Hall: Are you interested in training? We have a class for new workers.</a:t>
-            </a:r>
-          </a:p>
-          <a:p>
-            <a:r>
-              <a:t>Lucia: Yes! I'm very interested in learning about the machines here.</a:t>
-            </a:r>
-          </a:p>
-          <a:p>
-            <a:r>
-              <a:t>Mr. Hall: Which shift can you work?</a:t>
-            </a:r>
-          </a:p>
-          <a:p>
-            <a:r>
-              <a:t>Lucia: I can work the day shift. And I don't mind working weekends.</a:t>
-            </a:r>
-          </a:p>
-          <a:p>
-            <a:r>
-              <a:t>Mr. Hall: Great. I'd like you to meet our team. Can you come back on Thursday for a second interview?</a:t>
-            </a:r>
-          </a:p>
-          <a:p>
-            <a:r>
-              <a:t>Lucia: Yes, of course. Thank you!</a:t>
-            </a:r>
-          </a:p>
-          <a:p>
-            <a:r>
-              <a:t>Narrator: That's the end of the listening.</a:t>
             </a:r>
           </a:p>
         </p:txBody>
@@ -12438,7 +12353,7 @@
                 <a:ea typeface="Lexend Deca" pitchFamily="34" charset="-122"/>
                 <a:cs typeface="Lexend Deca" pitchFamily="34" charset="-120"/>
               </a:rPr>
-              <a:t>Audio: about 1:15. It plays once.</a:t>
+              <a:t>Audio: about 1:20. It plays once.</a:t>
             </a:r>
             <a:endParaRPr lang="en-US" sz="2200" dirty="0"/>
           </a:p>
@@ -32515,7 +32430,7 @@
                 <a:ea typeface="Lexend Deca" pitchFamily="34" charset="-122"/>
                 <a:cs typeface="Lexend Deca" pitchFamily="34" charset="-120"/>
               </a:rPr>
-              <a:t>Audio (coming soon): synthetic voices made with Chatterbox TTS (MIT License), cloned from short synthetic reference clips made with Kokoro-82M (Apache License 2.0). No recordings of real people. Each file will carry an inaudible Perth watermark marking it as AI-generated. Font: Lexend Deca (OFL 1.1).</a:t>
+              <a:t>Audio: synthetic voices made with Chatterbox TTS (MIT License), cloned from short synthetic reference clips made with Kokoro-82M (Apache License 2.0). No recordings of real people were used. Each file carries an inaudible Perth watermark marking it as AI-generated. Font: Lexend Deca (OFL 1.1).</a:t>
             </a:r>
             <a:endParaRPr lang="en-US" sz="1350" dirty="0" b="0"/>
           </a:p>
